--- a/Amazon_Sales_Analysis_Presentation.pptx
+++ b/Amazon_Sales_Analysis_Presentation.pptx
@@ -8276,66 +8276,6 @@
       </p:sp>
       <p:sp>
         <p:nvSpPr>
-          <p:cNvPr id="7" name="Shape 5"/>
-          <p:cNvSpPr/>
-          <p:nvPr/>
-        </p:nvSpPr>
-        <p:spPr>
-          <a:xfrm>
-            <a:off x="822960" y="1783080"/>
-            <a:ext cx="146304" cy="146304"/>
-          </a:xfrm>
-          <a:prstGeom prst="ellipse">
-            <a:avLst/>
-          </a:prstGeom>
-          <a:solidFill>
-            <a:srgbClr val="E74C3C"/>
-          </a:solidFill>
-          <a:ln/>
-        </p:spPr>
-      </p:sp>
-      <p:sp>
-        <p:nvSpPr>
-          <p:cNvPr id="8" name="Shape 6"/>
-          <p:cNvSpPr/>
-          <p:nvPr/>
-        </p:nvSpPr>
-        <p:spPr>
-          <a:xfrm>
-            <a:off x="1078992" y="1783080"/>
-            <a:ext cx="146304" cy="146304"/>
-          </a:xfrm>
-          <a:prstGeom prst="ellipse">
-            <a:avLst/>
-          </a:prstGeom>
-          <a:solidFill>
-            <a:srgbClr val="F1C40F"/>
-          </a:solidFill>
-          <a:ln/>
-        </p:spPr>
-      </p:sp>
-      <p:sp>
-        <p:nvSpPr>
-          <p:cNvPr id="9" name="Shape 7"/>
-          <p:cNvSpPr/>
-          <p:nvPr/>
-        </p:nvSpPr>
-        <p:spPr>
-          <a:xfrm>
-            <a:off x="1335024" y="1783080"/>
-            <a:ext cx="146304" cy="146304"/>
-          </a:xfrm>
-          <a:prstGeom prst="ellipse">
-            <a:avLst/>
-          </a:prstGeom>
-          <a:solidFill>
-            <a:srgbClr val="2ECC71"/>
-          </a:solidFill>
-          <a:ln/>
-        </p:spPr>
-      </p:sp>
-      <p:sp>
-        <p:nvSpPr>
           <p:cNvPr id="10" name="Text 8"/>
           <p:cNvSpPr/>
           <p:nvPr/>
@@ -9253,6 +9193,36 @@
           </a:p>
         </p:txBody>
       </p:sp>
+      <p:pic>
+        <p:nvPicPr>
+          <p:cNvPr id="40" name="Picture 39">
+            <a:extLst>
+              <a:ext uri="{FF2B5EF4-FFF2-40B4-BE49-F238E27FC236}">
+                <a16:creationId xmlns:a16="http://schemas.microsoft.com/office/drawing/2014/main" id="{FC71FB25-2530-1648-4DEC-6469D0EE8C05}"/>
+              </a:ext>
+            </a:extLst>
+          </p:cNvPr>
+          <p:cNvPicPr>
+            <a:picLocks noChangeAspect="1"/>
+          </p:cNvPicPr>
+          <p:nvPr/>
+        </p:nvPicPr>
+        <p:blipFill>
+          <a:blip r:embed="rId6"/>
+          <a:stretch>
+            <a:fillRect/>
+          </a:stretch>
+        </p:blipFill>
+        <p:spPr>
+          <a:xfrm>
+            <a:off x="640080" y="1728216"/>
+            <a:ext cx="5964472" cy="4334480"/>
+          </a:xfrm>
+          <a:prstGeom prst="rect">
+            <a:avLst/>
+          </a:prstGeom>
+        </p:spPr>
+      </p:pic>
     </p:spTree>
   </p:cSld>
   <p:clrMapOvr>
@@ -9450,9 +9420,54 @@
           </a:ln>
         </p:spPr>
       </p:sp>
+      <p:sp>
+        <p:nvSpPr>
+          <p:cNvPr id="13" name="Text 9"/>
+          <p:cNvSpPr/>
+          <p:nvPr/>
+        </p:nvSpPr>
+        <p:spPr>
+          <a:xfrm>
+            <a:off x="11274552" y="6446520"/>
+            <a:ext cx="457200" cy="274320"/>
+          </a:xfrm>
+          <a:prstGeom prst="rect">
+            <a:avLst/>
+          </a:prstGeom>
+          <a:noFill/>
+          <a:ln/>
+        </p:spPr>
+        <p:txBody>
+          <a:bodyPr wrap="square" lIns="0" tIns="0" rIns="0" bIns="0" rtlCol="0" anchor="ctr"/>
+          <a:lstStyle/>
+          <a:p>
+            <a:pPr marL="0" indent="0" algn="r">
+              <a:buNone/>
+            </a:pPr>
+            <a:r>
+              <a:rPr lang="en-US" sz="900" dirty="0">
+                <a:solidFill>
+                  <a:srgbClr val="6B7480"/>
+                </a:solidFill>
+                <a:latin typeface="Calibri" pitchFamily="34" charset="0"/>
+                <a:ea typeface="Calibri" pitchFamily="34" charset="-122"/>
+                <a:cs typeface="Calibri" pitchFamily="34" charset="-120"/>
+              </a:rPr>
+              <a:t>3</a:t>
+            </a:r>
+            <a:endParaRPr lang="en-US" sz="900" dirty="0"/>
+          </a:p>
+        </p:txBody>
+      </p:sp>
       <p:pic>
         <p:nvPicPr>
-          <p:cNvPr id="7" name="Image 0" descr="images/chart_distributions.png"/>
+          <p:cNvPr id="15" name="Picture 14">
+            <a:extLst>
+              <a:ext uri="{FF2B5EF4-FFF2-40B4-BE49-F238E27FC236}">
+                <a16:creationId xmlns:a16="http://schemas.microsoft.com/office/drawing/2014/main" id="{DCF4407A-2428-6796-6712-C3721301A136}"/>
+              </a:ext>
+            </a:extLst>
+          </p:cNvPr>
           <p:cNvPicPr>
             <a:picLocks noChangeAspect="1"/>
           </p:cNvPicPr>
@@ -9460,13 +9475,14 @@
         </p:nvPicPr>
         <p:blipFill>
           <a:blip r:embed="rId3"/>
-          <a:srcRect/>
-          <a:stretch/>
+          <a:stretch>
+            <a:fillRect/>
+          </a:stretch>
         </p:blipFill>
         <p:spPr>
           <a:xfrm>
-            <a:off x="685800" y="1645920"/>
-            <a:ext cx="6172200" cy="3995928"/>
+            <a:off x="625709" y="1633828"/>
+            <a:ext cx="6256960" cy="4020111"/>
           </a:xfrm>
           <a:prstGeom prst="rect">
             <a:avLst/>
@@ -9475,1328 +9491,269 @@
       </p:pic>
       <p:sp>
         <p:nvSpPr>
-          <p:cNvPr id="8" name="Text 5"/>
-          <p:cNvSpPr/>
-          <p:nvPr/>
-        </p:nvSpPr>
-        <p:spPr>
-          <a:xfrm>
-            <a:off x="7178040" y="1508760"/>
-            <a:ext cx="4480560" cy="320040"/>
-          </a:xfrm>
-          <a:prstGeom prst="rect">
-            <a:avLst/>
-          </a:prstGeom>
-          <a:noFill/>
-          <a:ln/>
-        </p:spPr>
-        <p:txBody>
-          <a:bodyPr wrap="square" lIns="0" tIns="0" rIns="0" bIns="0" rtlCol="0" anchor="ctr"/>
-          <a:lstStyle/>
-          <a:p>
-            <a:pPr marL="0" indent="0">
-              <a:buNone/>
-            </a:pPr>
-            <a:r>
-              <a:rPr lang="en-US" sz="1400" b="1" dirty="0">
-                <a:solidFill>
-                  <a:srgbClr val="FF9900"/>
-                </a:solidFill>
-                <a:latin typeface="Calibri" pitchFamily="34" charset="0"/>
-                <a:ea typeface="Calibri" pitchFamily="34" charset="-122"/>
-                <a:cs typeface="Calibri" pitchFamily="34" charset="-120"/>
-              </a:rPr>
-              <a:t>Numeric Summary</a:t>
-            </a:r>
-            <a:endParaRPr lang="en-US" sz="1400" dirty="0"/>
-          </a:p>
-        </p:txBody>
-      </p:sp>
-      <p:graphicFrame>
-        <p:nvGraphicFramePr>
-          <p:cNvPr id="9" name="Table 0"/>
-          <p:cNvGraphicFramePr>
-            <a:graphicFrameLocks noGrp="1"/>
-          </p:cNvGraphicFramePr>
-          <p:nvPr>
-            <p:extLst>
-              <p:ext uri="{D42A27DB-BD31-4B8C-83A1-F6EECF244321}">
-                <p14:modId xmlns:p14="http://schemas.microsoft.com/office/powerpoint/2010/main" val="1579011935"/>
-              </p:ext>
-            </p:extLst>
-          </p:nvPr>
-        </p:nvGraphicFramePr>
-        <p:xfrm>
-          <a:off x="7178040" y="1874520"/>
-          <a:ext cx="4480559" cy="1417320"/>
-        </p:xfrm>
-        <a:graphic>
-          <a:graphicData uri="http://schemas.openxmlformats.org/drawingml/2006/table">
-            <a:tbl>
-              <a:tblPr/>
-              <a:tblGrid>
-                <a:gridCol w="1881835">
-                  <a:extLst>
-                    <a:ext uri="{9D8B030D-6E8A-4147-A177-3AD203B41FA5}">
-                      <a16:colId xmlns:a16="http://schemas.microsoft.com/office/drawing/2014/main" val="20000"/>
-                    </a:ext>
-                  </a:extLst>
-                </a:gridCol>
-                <a:gridCol w="1299362">
-                  <a:extLst>
-                    <a:ext uri="{9D8B030D-6E8A-4147-A177-3AD203B41FA5}">
-                      <a16:colId xmlns:a16="http://schemas.microsoft.com/office/drawing/2014/main" val="20001"/>
-                    </a:ext>
-                  </a:extLst>
-                </a:gridCol>
-                <a:gridCol w="1299362">
-                  <a:extLst>
-                    <a:ext uri="{9D8B030D-6E8A-4147-A177-3AD203B41FA5}">
-                      <a16:colId xmlns:a16="http://schemas.microsoft.com/office/drawing/2014/main" val="20002"/>
-                    </a:ext>
-                  </a:extLst>
-                </a:gridCol>
-              </a:tblGrid>
-              <a:tr h="283464">
-                <a:tc>
-                  <a:txBody>
-                    <a:bodyPr/>
-                    <a:lstStyle/>
-                    <a:p>
-                      <a:pPr marL="0" indent="0">
-                        <a:buNone/>
-                      </a:pPr>
-                      <a:r>
-                        <a:rPr lang="en-US" sz="1100" b="1" dirty="0">
-                          <a:solidFill>
-                            <a:srgbClr val="FFFFFF"/>
-                          </a:solidFill>
-                          <a:latin typeface="Calibri" pitchFamily="34" charset="0"/>
-                          <a:ea typeface="Calibri" pitchFamily="34" charset="-122"/>
-                          <a:cs typeface="Calibri" pitchFamily="34" charset="-120"/>
-                        </a:rPr>
-                        <a:t>Field</a:t>
-                      </a:r>
-                      <a:endParaRPr lang="en-US" sz="1100" dirty="0">
-                        <a:latin typeface="Calibri" charset="0"/>
-                        <a:ea typeface="Calibri" charset="0"/>
-                        <a:cs typeface="Calibri" charset="0"/>
-                      </a:endParaRPr>
-                    </a:p>
-                  </a:txBody>
-                  <a:tcPr>
-                    <a:lnL w="6350" cap="flat" cmpd="sng" algn="ctr">
-                      <a:solidFill>
-                        <a:srgbClr val="343E4C"/>
-                      </a:solidFill>
-                      <a:prstDash val="solid"/>
-                      <a:round/>
-                      <a:headEnd type="none" w="med" len="med"/>
-                      <a:tailEnd type="none" w="med" len="med"/>
-                    </a:lnL>
-                    <a:lnR w="6350" cap="flat" cmpd="sng" algn="ctr">
-                      <a:solidFill>
-                        <a:srgbClr val="343E4C"/>
-                      </a:solidFill>
-                      <a:prstDash val="solid"/>
-                      <a:round/>
-                      <a:headEnd type="none" w="med" len="med"/>
-                      <a:tailEnd type="none" w="med" len="med"/>
-                    </a:lnR>
-                    <a:lnT w="6350" cap="flat" cmpd="sng" algn="ctr">
-                      <a:solidFill>
-                        <a:srgbClr val="343E4C"/>
-                      </a:solidFill>
-                      <a:prstDash val="solid"/>
-                      <a:round/>
-                      <a:headEnd type="none" w="med" len="med"/>
-                      <a:tailEnd type="none" w="med" len="med"/>
-                    </a:lnT>
-                    <a:lnB w="6350" cap="flat" cmpd="sng" algn="ctr">
-                      <a:solidFill>
-                        <a:srgbClr val="343E4C"/>
-                      </a:solidFill>
-                      <a:prstDash val="solid"/>
-                      <a:round/>
-                      <a:headEnd type="none" w="med" len="med"/>
-                      <a:tailEnd type="none" w="med" len="med"/>
-                    </a:lnB>
-                    <a:solidFill>
-                      <a:srgbClr val="2A3340"/>
-                    </a:solidFill>
-                  </a:tcPr>
-                </a:tc>
-                <a:tc>
-                  <a:txBody>
-                    <a:bodyPr/>
-                    <a:lstStyle/>
-                    <a:p>
-                      <a:pPr marL="0" indent="0">
-                        <a:buNone/>
-                      </a:pPr>
-                      <a:r>
-                        <a:rPr lang="en-US" sz="1100" b="1" dirty="0">
-                          <a:solidFill>
-                            <a:srgbClr val="FFFFFF"/>
-                          </a:solidFill>
-                          <a:latin typeface="Calibri" pitchFamily="34" charset="0"/>
-                          <a:ea typeface="Calibri" pitchFamily="34" charset="-122"/>
-                          <a:cs typeface="Calibri" pitchFamily="34" charset="-120"/>
-                        </a:rPr>
-                        <a:t>Mean</a:t>
-                      </a:r>
-                      <a:endParaRPr lang="en-US" sz="1100" dirty="0">
-                        <a:latin typeface="Calibri" charset="0"/>
-                        <a:ea typeface="Calibri" charset="0"/>
-                        <a:cs typeface="Calibri" charset="0"/>
-                      </a:endParaRPr>
-                    </a:p>
-                  </a:txBody>
-                  <a:tcPr>
-                    <a:lnL w="6350" cap="flat" cmpd="sng" algn="ctr">
-                      <a:solidFill>
-                        <a:srgbClr val="343E4C"/>
-                      </a:solidFill>
-                      <a:prstDash val="solid"/>
-                      <a:round/>
-                      <a:headEnd type="none" w="med" len="med"/>
-                      <a:tailEnd type="none" w="med" len="med"/>
-                    </a:lnL>
-                    <a:lnR w="6350" cap="flat" cmpd="sng" algn="ctr">
-                      <a:solidFill>
-                        <a:srgbClr val="343E4C"/>
-                      </a:solidFill>
-                      <a:prstDash val="solid"/>
-                      <a:round/>
-                      <a:headEnd type="none" w="med" len="med"/>
-                      <a:tailEnd type="none" w="med" len="med"/>
-                    </a:lnR>
-                    <a:lnT w="6350" cap="flat" cmpd="sng" algn="ctr">
-                      <a:solidFill>
-                        <a:srgbClr val="343E4C"/>
-                      </a:solidFill>
-                      <a:prstDash val="solid"/>
-                      <a:round/>
-                      <a:headEnd type="none" w="med" len="med"/>
-                      <a:tailEnd type="none" w="med" len="med"/>
-                    </a:lnT>
-                    <a:lnB w="6350" cap="flat" cmpd="sng" algn="ctr">
-                      <a:solidFill>
-                        <a:srgbClr val="343E4C"/>
-                      </a:solidFill>
-                      <a:prstDash val="solid"/>
-                      <a:round/>
-                      <a:headEnd type="none" w="med" len="med"/>
-                      <a:tailEnd type="none" w="med" len="med"/>
-                    </a:lnB>
-                    <a:solidFill>
-                      <a:srgbClr val="2A3340"/>
-                    </a:solidFill>
-                  </a:tcPr>
-                </a:tc>
-                <a:tc>
-                  <a:txBody>
-                    <a:bodyPr/>
-                    <a:lstStyle/>
-                    <a:p>
-                      <a:pPr marL="0" indent="0">
-                        <a:buNone/>
-                      </a:pPr>
-                      <a:r>
-                        <a:rPr lang="en-US" sz="1100" b="1" dirty="0">
-                          <a:solidFill>
-                            <a:srgbClr val="FFFFFF"/>
-                          </a:solidFill>
-                          <a:latin typeface="Calibri" pitchFamily="34" charset="0"/>
-                          <a:ea typeface="Calibri" pitchFamily="34" charset="-122"/>
-                          <a:cs typeface="Calibri" pitchFamily="34" charset="-120"/>
-                        </a:rPr>
-                        <a:t>Median</a:t>
-                      </a:r>
-                      <a:endParaRPr lang="en-US" sz="1100" dirty="0">
-                        <a:latin typeface="Calibri" charset="0"/>
-                        <a:ea typeface="Calibri" charset="0"/>
-                        <a:cs typeface="Calibri" charset="0"/>
-                      </a:endParaRPr>
-                    </a:p>
-                  </a:txBody>
-                  <a:tcPr>
-                    <a:lnL w="6350" cap="flat" cmpd="sng" algn="ctr">
-                      <a:solidFill>
-                        <a:srgbClr val="343E4C"/>
-                      </a:solidFill>
-                      <a:prstDash val="solid"/>
-                      <a:round/>
-                      <a:headEnd type="none" w="med" len="med"/>
-                      <a:tailEnd type="none" w="med" len="med"/>
-                    </a:lnL>
-                    <a:lnR w="6350" cap="flat" cmpd="sng" algn="ctr">
-                      <a:solidFill>
-                        <a:srgbClr val="343E4C"/>
-                      </a:solidFill>
-                      <a:prstDash val="solid"/>
-                      <a:round/>
-                      <a:headEnd type="none" w="med" len="med"/>
-                      <a:tailEnd type="none" w="med" len="med"/>
-                    </a:lnR>
-                    <a:lnT w="6350" cap="flat" cmpd="sng" algn="ctr">
-                      <a:solidFill>
-                        <a:srgbClr val="343E4C"/>
-                      </a:solidFill>
-                      <a:prstDash val="solid"/>
-                      <a:round/>
-                      <a:headEnd type="none" w="med" len="med"/>
-                      <a:tailEnd type="none" w="med" len="med"/>
-                    </a:lnT>
-                    <a:lnB w="6350" cap="flat" cmpd="sng" algn="ctr">
-                      <a:solidFill>
-                        <a:srgbClr val="343E4C"/>
-                      </a:solidFill>
-                      <a:prstDash val="solid"/>
-                      <a:round/>
-                      <a:headEnd type="none" w="med" len="med"/>
-                      <a:tailEnd type="none" w="med" len="med"/>
-                    </a:lnB>
-                    <a:solidFill>
-                      <a:srgbClr val="2A3340"/>
-                    </a:solidFill>
-                  </a:tcPr>
-                </a:tc>
-                <a:extLst>
-                  <a:ext uri="{0D108BD9-81ED-4DB2-BD59-A6C34878D82A}">
-                    <a16:rowId xmlns:a16="http://schemas.microsoft.com/office/drawing/2014/main" val="10000"/>
-                  </a:ext>
-                </a:extLst>
-              </a:tr>
-              <a:tr h="283464">
-                <a:tc>
-                  <a:txBody>
-                    <a:bodyPr/>
-                    <a:lstStyle/>
-                    <a:p>
-                      <a:pPr marL="0" indent="0">
-                        <a:buNone/>
-                      </a:pPr>
-                      <a:r>
-                        <a:rPr lang="en-US" sz="1100" dirty="0">
-                          <a:solidFill>
-                            <a:srgbClr val="FFFFFF"/>
-                          </a:solidFill>
-                          <a:latin typeface="Calibri" pitchFamily="34" charset="0"/>
-                          <a:ea typeface="Calibri" pitchFamily="34" charset="-122"/>
-                          <a:cs typeface="Calibri" pitchFamily="34" charset="-120"/>
-                        </a:rPr>
-                        <a:t>TotalAmount</a:t>
-                      </a:r>
-                      <a:endParaRPr lang="en-US" sz="1100" dirty="0">
-                        <a:latin typeface="Calibri" charset="0"/>
-                        <a:ea typeface="Calibri" charset="0"/>
-                        <a:cs typeface="Calibri" charset="0"/>
-                      </a:endParaRPr>
-                    </a:p>
-                  </a:txBody>
-                  <a:tcPr>
-                    <a:lnL w="6350" cap="flat" cmpd="sng" algn="ctr">
-                      <a:solidFill>
-                        <a:srgbClr val="343E4C"/>
-                      </a:solidFill>
-                      <a:prstDash val="solid"/>
-                      <a:round/>
-                      <a:headEnd type="none" w="med" len="med"/>
-                      <a:tailEnd type="none" w="med" len="med"/>
-                    </a:lnL>
-                    <a:lnR w="6350" cap="flat" cmpd="sng" algn="ctr">
-                      <a:solidFill>
-                        <a:srgbClr val="343E4C"/>
-                      </a:solidFill>
-                      <a:prstDash val="solid"/>
-                      <a:round/>
-                      <a:headEnd type="none" w="med" len="med"/>
-                      <a:tailEnd type="none" w="med" len="med"/>
-                    </a:lnR>
-                    <a:lnT w="6350" cap="flat" cmpd="sng" algn="ctr">
-                      <a:solidFill>
-                        <a:srgbClr val="343E4C"/>
-                      </a:solidFill>
-                      <a:prstDash val="solid"/>
-                      <a:round/>
-                      <a:headEnd type="none" w="med" len="med"/>
-                      <a:tailEnd type="none" w="med" len="med"/>
-                    </a:lnT>
-                    <a:lnB w="6350" cap="flat" cmpd="sng" algn="ctr">
-                      <a:solidFill>
-                        <a:srgbClr val="343E4C"/>
-                      </a:solidFill>
-                      <a:prstDash val="solid"/>
-                      <a:round/>
-                      <a:headEnd type="none" w="med" len="med"/>
-                      <a:tailEnd type="none" w="med" len="med"/>
-                    </a:lnB>
-                    <a:solidFill>
-                      <a:srgbClr val="1E2530"/>
-                    </a:solidFill>
-                  </a:tcPr>
-                </a:tc>
-                <a:tc>
-                  <a:txBody>
-                    <a:bodyPr/>
-                    <a:lstStyle/>
-                    <a:p>
-                      <a:pPr marL="0" indent="0">
-                        <a:buNone/>
-                      </a:pPr>
-                      <a:r>
-                        <a:rPr lang="en-US" sz="1100" dirty="0">
-                          <a:solidFill>
-                            <a:srgbClr val="FFFFFF"/>
-                          </a:solidFill>
-                          <a:latin typeface="Calibri" pitchFamily="34" charset="0"/>
-                          <a:ea typeface="Calibri" pitchFamily="34" charset="-122"/>
-                          <a:cs typeface="Calibri" pitchFamily="34" charset="-120"/>
-                        </a:rPr>
-                        <a:t>$918.26</a:t>
-                      </a:r>
-                      <a:endParaRPr lang="en-US" sz="1100" dirty="0">
-                        <a:latin typeface="Calibri" charset="0"/>
-                        <a:ea typeface="Calibri" charset="0"/>
-                        <a:cs typeface="Calibri" charset="0"/>
-                      </a:endParaRPr>
-                    </a:p>
-                  </a:txBody>
-                  <a:tcPr>
-                    <a:lnL w="6350" cap="flat" cmpd="sng" algn="ctr">
-                      <a:solidFill>
-                        <a:srgbClr val="343E4C"/>
-                      </a:solidFill>
-                      <a:prstDash val="solid"/>
-                      <a:round/>
-                      <a:headEnd type="none" w="med" len="med"/>
-                      <a:tailEnd type="none" w="med" len="med"/>
-                    </a:lnL>
-                    <a:lnR w="6350" cap="flat" cmpd="sng" algn="ctr">
-                      <a:solidFill>
-                        <a:srgbClr val="343E4C"/>
-                      </a:solidFill>
-                      <a:prstDash val="solid"/>
-                      <a:round/>
-                      <a:headEnd type="none" w="med" len="med"/>
-                      <a:tailEnd type="none" w="med" len="med"/>
-                    </a:lnR>
-                    <a:lnT w="6350" cap="flat" cmpd="sng" algn="ctr">
-                      <a:solidFill>
-                        <a:srgbClr val="343E4C"/>
-                      </a:solidFill>
-                      <a:prstDash val="solid"/>
-                      <a:round/>
-                      <a:headEnd type="none" w="med" len="med"/>
-                      <a:tailEnd type="none" w="med" len="med"/>
-                    </a:lnT>
-                    <a:lnB w="6350" cap="flat" cmpd="sng" algn="ctr">
-                      <a:solidFill>
-                        <a:srgbClr val="343E4C"/>
-                      </a:solidFill>
-                      <a:prstDash val="solid"/>
-                      <a:round/>
-                      <a:headEnd type="none" w="med" len="med"/>
-                      <a:tailEnd type="none" w="med" len="med"/>
-                    </a:lnB>
-                    <a:solidFill>
-                      <a:srgbClr val="1E2530"/>
-                    </a:solidFill>
-                  </a:tcPr>
-                </a:tc>
-                <a:tc>
-                  <a:txBody>
-                    <a:bodyPr/>
-                    <a:lstStyle/>
-                    <a:p>
-                      <a:pPr marL="0" indent="0">
-                        <a:buNone/>
-                      </a:pPr>
-                      <a:r>
-                        <a:rPr lang="en-US" sz="1100" dirty="0">
-                          <a:solidFill>
-                            <a:srgbClr val="FFFFFF"/>
-                          </a:solidFill>
-                          <a:latin typeface="Calibri" pitchFamily="34" charset="0"/>
-                          <a:ea typeface="Calibri" pitchFamily="34" charset="-122"/>
-                          <a:cs typeface="Calibri" pitchFamily="34" charset="-120"/>
-                        </a:rPr>
-                        <a:t>$714.32</a:t>
-                      </a:r>
-                      <a:endParaRPr lang="en-US" sz="1100" dirty="0">
-                        <a:latin typeface="Calibri" charset="0"/>
-                        <a:ea typeface="Calibri" charset="0"/>
-                        <a:cs typeface="Calibri" charset="0"/>
-                      </a:endParaRPr>
-                    </a:p>
-                  </a:txBody>
-                  <a:tcPr>
-                    <a:lnL w="6350" cap="flat" cmpd="sng" algn="ctr">
-                      <a:solidFill>
-                        <a:srgbClr val="343E4C"/>
-                      </a:solidFill>
-                      <a:prstDash val="solid"/>
-                      <a:round/>
-                      <a:headEnd type="none" w="med" len="med"/>
-                      <a:tailEnd type="none" w="med" len="med"/>
-                    </a:lnL>
-                    <a:lnR w="6350" cap="flat" cmpd="sng" algn="ctr">
-                      <a:solidFill>
-                        <a:srgbClr val="343E4C"/>
-                      </a:solidFill>
-                      <a:prstDash val="solid"/>
-                      <a:round/>
-                      <a:headEnd type="none" w="med" len="med"/>
-                      <a:tailEnd type="none" w="med" len="med"/>
-                    </a:lnR>
-                    <a:lnT w="6350" cap="flat" cmpd="sng" algn="ctr">
-                      <a:solidFill>
-                        <a:srgbClr val="343E4C"/>
-                      </a:solidFill>
-                      <a:prstDash val="solid"/>
-                      <a:round/>
-                      <a:headEnd type="none" w="med" len="med"/>
-                      <a:tailEnd type="none" w="med" len="med"/>
-                    </a:lnT>
-                    <a:lnB w="6350" cap="flat" cmpd="sng" algn="ctr">
-                      <a:solidFill>
-                        <a:srgbClr val="343E4C"/>
-                      </a:solidFill>
-                      <a:prstDash val="solid"/>
-                      <a:round/>
-                      <a:headEnd type="none" w="med" len="med"/>
-                      <a:tailEnd type="none" w="med" len="med"/>
-                    </a:lnB>
-                    <a:solidFill>
-                      <a:srgbClr val="1E2530"/>
-                    </a:solidFill>
-                  </a:tcPr>
-                </a:tc>
-                <a:extLst>
-                  <a:ext uri="{0D108BD9-81ED-4DB2-BD59-A6C34878D82A}">
-                    <a16:rowId xmlns:a16="http://schemas.microsoft.com/office/drawing/2014/main" val="10001"/>
-                  </a:ext>
-                </a:extLst>
-              </a:tr>
-              <a:tr h="283464">
-                <a:tc>
-                  <a:txBody>
-                    <a:bodyPr/>
-                    <a:lstStyle/>
-                    <a:p>
-                      <a:pPr marL="0" indent="0">
-                        <a:buNone/>
-                      </a:pPr>
-                      <a:r>
-                        <a:rPr lang="en-US" sz="1100" dirty="0">
-                          <a:solidFill>
-                            <a:srgbClr val="FFFFFF"/>
-                          </a:solidFill>
-                          <a:latin typeface="Calibri" pitchFamily="34" charset="0"/>
-                          <a:ea typeface="Calibri" pitchFamily="34" charset="-122"/>
-                          <a:cs typeface="Calibri" pitchFamily="34" charset="-120"/>
-                        </a:rPr>
-                        <a:t>UnitPrice</a:t>
-                      </a:r>
-                      <a:endParaRPr lang="en-US" sz="1100" dirty="0">
-                        <a:latin typeface="Calibri" charset="0"/>
-                        <a:ea typeface="Calibri" charset="0"/>
-                        <a:cs typeface="Calibri" charset="0"/>
-                      </a:endParaRPr>
-                    </a:p>
-                  </a:txBody>
-                  <a:tcPr>
-                    <a:lnL w="6350" cap="flat" cmpd="sng" algn="ctr">
-                      <a:solidFill>
-                        <a:srgbClr val="343E4C"/>
-                      </a:solidFill>
-                      <a:prstDash val="solid"/>
-                      <a:round/>
-                      <a:headEnd type="none" w="med" len="med"/>
-                      <a:tailEnd type="none" w="med" len="med"/>
-                    </a:lnL>
-                    <a:lnR w="6350" cap="flat" cmpd="sng" algn="ctr">
-                      <a:solidFill>
-                        <a:srgbClr val="343E4C"/>
-                      </a:solidFill>
-                      <a:prstDash val="solid"/>
-                      <a:round/>
-                      <a:headEnd type="none" w="med" len="med"/>
-                      <a:tailEnd type="none" w="med" len="med"/>
-                    </a:lnR>
-                    <a:lnT w="6350" cap="flat" cmpd="sng" algn="ctr">
-                      <a:solidFill>
-                        <a:srgbClr val="343E4C"/>
-                      </a:solidFill>
-                      <a:prstDash val="solid"/>
-                      <a:round/>
-                      <a:headEnd type="none" w="med" len="med"/>
-                      <a:tailEnd type="none" w="med" len="med"/>
-                    </a:lnT>
-                    <a:lnB w="6350" cap="flat" cmpd="sng" algn="ctr">
-                      <a:solidFill>
-                        <a:srgbClr val="343E4C"/>
-                      </a:solidFill>
-                      <a:prstDash val="solid"/>
-                      <a:round/>
-                      <a:headEnd type="none" w="med" len="med"/>
-                      <a:tailEnd type="none" w="med" len="med"/>
-                    </a:lnB>
-                    <a:solidFill>
-                      <a:srgbClr val="1E2530"/>
-                    </a:solidFill>
-                  </a:tcPr>
-                </a:tc>
-                <a:tc>
-                  <a:txBody>
-                    <a:bodyPr/>
-                    <a:lstStyle/>
-                    <a:p>
-                      <a:pPr marL="0" indent="0">
-                        <a:buNone/>
-                      </a:pPr>
-                      <a:r>
-                        <a:rPr lang="en-US" sz="1100" dirty="0">
-                          <a:solidFill>
-                            <a:srgbClr val="FFFFFF"/>
-                          </a:solidFill>
-                          <a:latin typeface="Calibri" pitchFamily="34" charset="0"/>
-                          <a:ea typeface="Calibri" pitchFamily="34" charset="-122"/>
-                          <a:cs typeface="Calibri" pitchFamily="34" charset="-120"/>
-                        </a:rPr>
-                        <a:t>$302.91</a:t>
-                      </a:r>
-                      <a:endParaRPr lang="en-US" sz="1100" dirty="0">
-                        <a:latin typeface="Calibri" charset="0"/>
-                        <a:ea typeface="Calibri" charset="0"/>
-                        <a:cs typeface="Calibri" charset="0"/>
-                      </a:endParaRPr>
-                    </a:p>
-                  </a:txBody>
-                  <a:tcPr>
-                    <a:lnL w="6350" cap="flat" cmpd="sng" algn="ctr">
-                      <a:solidFill>
-                        <a:srgbClr val="343E4C"/>
-                      </a:solidFill>
-                      <a:prstDash val="solid"/>
-                      <a:round/>
-                      <a:headEnd type="none" w="med" len="med"/>
-                      <a:tailEnd type="none" w="med" len="med"/>
-                    </a:lnL>
-                    <a:lnR w="6350" cap="flat" cmpd="sng" algn="ctr">
-                      <a:solidFill>
-                        <a:srgbClr val="343E4C"/>
-                      </a:solidFill>
-                      <a:prstDash val="solid"/>
-                      <a:round/>
-                      <a:headEnd type="none" w="med" len="med"/>
-                      <a:tailEnd type="none" w="med" len="med"/>
-                    </a:lnR>
-                    <a:lnT w="6350" cap="flat" cmpd="sng" algn="ctr">
-                      <a:solidFill>
-                        <a:srgbClr val="343E4C"/>
-                      </a:solidFill>
-                      <a:prstDash val="solid"/>
-                      <a:round/>
-                      <a:headEnd type="none" w="med" len="med"/>
-                      <a:tailEnd type="none" w="med" len="med"/>
-                    </a:lnT>
-                    <a:lnB w="6350" cap="flat" cmpd="sng" algn="ctr">
-                      <a:solidFill>
-                        <a:srgbClr val="343E4C"/>
-                      </a:solidFill>
-                      <a:prstDash val="solid"/>
-                      <a:round/>
-                      <a:headEnd type="none" w="med" len="med"/>
-                      <a:tailEnd type="none" w="med" len="med"/>
-                    </a:lnB>
-                    <a:solidFill>
-                      <a:srgbClr val="1E2530"/>
-                    </a:solidFill>
-                  </a:tcPr>
-                </a:tc>
-                <a:tc>
-                  <a:txBody>
-                    <a:bodyPr/>
-                    <a:lstStyle/>
-                    <a:p>
-                      <a:pPr marL="0" indent="0">
-                        <a:buNone/>
-                      </a:pPr>
-                      <a:r>
-                        <a:rPr lang="en-US" sz="1100" dirty="0">
-                          <a:solidFill>
-                            <a:srgbClr val="FFFFFF"/>
-                          </a:solidFill>
-                          <a:latin typeface="Calibri" pitchFamily="34" charset="0"/>
-                          <a:ea typeface="Calibri" pitchFamily="34" charset="-122"/>
-                          <a:cs typeface="Calibri" pitchFamily="34" charset="-120"/>
-                        </a:rPr>
-                        <a:t>$303.07</a:t>
-                      </a:r>
-                      <a:endParaRPr lang="en-US" sz="1100" dirty="0">
-                        <a:latin typeface="Calibri" charset="0"/>
-                        <a:ea typeface="Calibri" charset="0"/>
-                        <a:cs typeface="Calibri" charset="0"/>
-                      </a:endParaRPr>
-                    </a:p>
-                  </a:txBody>
-                  <a:tcPr>
-                    <a:lnL w="6350" cap="flat" cmpd="sng" algn="ctr">
-                      <a:solidFill>
-                        <a:srgbClr val="343E4C"/>
-                      </a:solidFill>
-                      <a:prstDash val="solid"/>
-                      <a:round/>
-                      <a:headEnd type="none" w="med" len="med"/>
-                      <a:tailEnd type="none" w="med" len="med"/>
-                    </a:lnL>
-                    <a:lnR w="6350" cap="flat" cmpd="sng" algn="ctr">
-                      <a:solidFill>
-                        <a:srgbClr val="343E4C"/>
-                      </a:solidFill>
-                      <a:prstDash val="solid"/>
-                      <a:round/>
-                      <a:headEnd type="none" w="med" len="med"/>
-                      <a:tailEnd type="none" w="med" len="med"/>
-                    </a:lnR>
-                    <a:lnT w="6350" cap="flat" cmpd="sng" algn="ctr">
-                      <a:solidFill>
-                        <a:srgbClr val="343E4C"/>
-                      </a:solidFill>
-                      <a:prstDash val="solid"/>
-                      <a:round/>
-                      <a:headEnd type="none" w="med" len="med"/>
-                      <a:tailEnd type="none" w="med" len="med"/>
-                    </a:lnT>
-                    <a:lnB w="6350" cap="flat" cmpd="sng" algn="ctr">
-                      <a:solidFill>
-                        <a:srgbClr val="343E4C"/>
-                      </a:solidFill>
-                      <a:prstDash val="solid"/>
-                      <a:round/>
-                      <a:headEnd type="none" w="med" len="med"/>
-                      <a:tailEnd type="none" w="med" len="med"/>
-                    </a:lnB>
-                    <a:solidFill>
-                      <a:srgbClr val="1E2530"/>
-                    </a:solidFill>
-                  </a:tcPr>
-                </a:tc>
-                <a:extLst>
-                  <a:ext uri="{0D108BD9-81ED-4DB2-BD59-A6C34878D82A}">
-                    <a16:rowId xmlns:a16="http://schemas.microsoft.com/office/drawing/2014/main" val="10002"/>
-                  </a:ext>
-                </a:extLst>
-              </a:tr>
-              <a:tr h="283464">
-                <a:tc>
-                  <a:txBody>
-                    <a:bodyPr/>
-                    <a:lstStyle/>
-                    <a:p>
-                      <a:pPr marL="0" indent="0">
-                        <a:buNone/>
-                      </a:pPr>
-                      <a:r>
-                        <a:rPr lang="en-US" sz="1100" dirty="0">
-                          <a:solidFill>
-                            <a:srgbClr val="FFFFFF"/>
-                          </a:solidFill>
-                          <a:latin typeface="Calibri" pitchFamily="34" charset="0"/>
-                          <a:ea typeface="Calibri" pitchFamily="34" charset="-122"/>
-                          <a:cs typeface="Calibri" pitchFamily="34" charset="-120"/>
-                        </a:rPr>
-                        <a:t>Quantity</a:t>
-                      </a:r>
-                      <a:endParaRPr lang="en-US" sz="1100" dirty="0">
-                        <a:latin typeface="Calibri" charset="0"/>
-                        <a:ea typeface="Calibri" charset="0"/>
-                        <a:cs typeface="Calibri" charset="0"/>
-                      </a:endParaRPr>
-                    </a:p>
-                  </a:txBody>
-                  <a:tcPr>
-                    <a:lnL w="6350" cap="flat" cmpd="sng" algn="ctr">
-                      <a:solidFill>
-                        <a:srgbClr val="343E4C"/>
-                      </a:solidFill>
-                      <a:prstDash val="solid"/>
-                      <a:round/>
-                      <a:headEnd type="none" w="med" len="med"/>
-                      <a:tailEnd type="none" w="med" len="med"/>
-                    </a:lnL>
-                    <a:lnR w="6350" cap="flat" cmpd="sng" algn="ctr">
-                      <a:solidFill>
-                        <a:srgbClr val="343E4C"/>
-                      </a:solidFill>
-                      <a:prstDash val="solid"/>
-                      <a:round/>
-                      <a:headEnd type="none" w="med" len="med"/>
-                      <a:tailEnd type="none" w="med" len="med"/>
-                    </a:lnR>
-                    <a:lnT w="6350" cap="flat" cmpd="sng" algn="ctr">
-                      <a:solidFill>
-                        <a:srgbClr val="343E4C"/>
-                      </a:solidFill>
-                      <a:prstDash val="solid"/>
-                      <a:round/>
-                      <a:headEnd type="none" w="med" len="med"/>
-                      <a:tailEnd type="none" w="med" len="med"/>
-                    </a:lnT>
-                    <a:lnB w="6350" cap="flat" cmpd="sng" algn="ctr">
-                      <a:solidFill>
-                        <a:srgbClr val="343E4C"/>
-                      </a:solidFill>
-                      <a:prstDash val="solid"/>
-                      <a:round/>
-                      <a:headEnd type="none" w="med" len="med"/>
-                      <a:tailEnd type="none" w="med" len="med"/>
-                    </a:lnB>
-                    <a:solidFill>
-                      <a:srgbClr val="1E2530"/>
-                    </a:solidFill>
-                  </a:tcPr>
-                </a:tc>
-                <a:tc>
-                  <a:txBody>
-                    <a:bodyPr/>
-                    <a:lstStyle/>
-                    <a:p>
-                      <a:pPr marL="0" indent="0">
-                        <a:buNone/>
-                      </a:pPr>
-                      <a:r>
-                        <a:rPr lang="en-US" sz="1100" dirty="0">
-                          <a:solidFill>
-                            <a:srgbClr val="FFFFFF"/>
-                          </a:solidFill>
-                          <a:latin typeface="Calibri" pitchFamily="34" charset="0"/>
-                          <a:ea typeface="Calibri" pitchFamily="34" charset="-122"/>
-                          <a:cs typeface="Calibri" pitchFamily="34" charset="-120"/>
-                        </a:rPr>
-                        <a:t>3.00</a:t>
-                      </a:r>
-                      <a:endParaRPr lang="en-US" sz="1100" dirty="0">
-                        <a:latin typeface="Calibri" charset="0"/>
-                        <a:ea typeface="Calibri" charset="0"/>
-                        <a:cs typeface="Calibri" charset="0"/>
-                      </a:endParaRPr>
-                    </a:p>
-                  </a:txBody>
-                  <a:tcPr>
-                    <a:lnL w="6350" cap="flat" cmpd="sng" algn="ctr">
-                      <a:solidFill>
-                        <a:srgbClr val="343E4C"/>
-                      </a:solidFill>
-                      <a:prstDash val="solid"/>
-                      <a:round/>
-                      <a:headEnd type="none" w="med" len="med"/>
-                      <a:tailEnd type="none" w="med" len="med"/>
-                    </a:lnL>
-                    <a:lnR w="6350" cap="flat" cmpd="sng" algn="ctr">
-                      <a:solidFill>
-                        <a:srgbClr val="343E4C"/>
-                      </a:solidFill>
-                      <a:prstDash val="solid"/>
-                      <a:round/>
-                      <a:headEnd type="none" w="med" len="med"/>
-                      <a:tailEnd type="none" w="med" len="med"/>
-                    </a:lnR>
-                    <a:lnT w="6350" cap="flat" cmpd="sng" algn="ctr">
-                      <a:solidFill>
-                        <a:srgbClr val="343E4C"/>
-                      </a:solidFill>
-                      <a:prstDash val="solid"/>
-                      <a:round/>
-                      <a:headEnd type="none" w="med" len="med"/>
-                      <a:tailEnd type="none" w="med" len="med"/>
-                    </a:lnT>
-                    <a:lnB w="6350" cap="flat" cmpd="sng" algn="ctr">
-                      <a:solidFill>
-                        <a:srgbClr val="343E4C"/>
-                      </a:solidFill>
-                      <a:prstDash val="solid"/>
-                      <a:round/>
-                      <a:headEnd type="none" w="med" len="med"/>
-                      <a:tailEnd type="none" w="med" len="med"/>
-                    </a:lnB>
-                    <a:solidFill>
-                      <a:srgbClr val="1E2530"/>
-                    </a:solidFill>
-                  </a:tcPr>
-                </a:tc>
-                <a:tc>
-                  <a:txBody>
-                    <a:bodyPr/>
-                    <a:lstStyle/>
-                    <a:p>
-                      <a:pPr marL="0" indent="0">
-                        <a:buNone/>
-                      </a:pPr>
-                      <a:r>
-                        <a:rPr lang="en-US" sz="1100" dirty="0">
-                          <a:solidFill>
-                            <a:srgbClr val="FFFFFF"/>
-                          </a:solidFill>
-                          <a:latin typeface="Calibri" pitchFamily="34" charset="0"/>
-                          <a:ea typeface="Calibri" pitchFamily="34" charset="-122"/>
-                          <a:cs typeface="Calibri" pitchFamily="34" charset="-120"/>
-                        </a:rPr>
-                        <a:t>3.00</a:t>
-                      </a:r>
-                      <a:endParaRPr lang="en-US" sz="1100" dirty="0">
-                        <a:latin typeface="Calibri" charset="0"/>
-                        <a:ea typeface="Calibri" charset="0"/>
-                        <a:cs typeface="Calibri" charset="0"/>
-                      </a:endParaRPr>
-                    </a:p>
-                  </a:txBody>
-                  <a:tcPr>
-                    <a:lnL w="6350" cap="flat" cmpd="sng" algn="ctr">
-                      <a:solidFill>
-                        <a:srgbClr val="343E4C"/>
-                      </a:solidFill>
-                      <a:prstDash val="solid"/>
-                      <a:round/>
-                      <a:headEnd type="none" w="med" len="med"/>
-                      <a:tailEnd type="none" w="med" len="med"/>
-                    </a:lnL>
-                    <a:lnR w="6350" cap="flat" cmpd="sng" algn="ctr">
-                      <a:solidFill>
-                        <a:srgbClr val="343E4C"/>
-                      </a:solidFill>
-                      <a:prstDash val="solid"/>
-                      <a:round/>
-                      <a:headEnd type="none" w="med" len="med"/>
-                      <a:tailEnd type="none" w="med" len="med"/>
-                    </a:lnR>
-                    <a:lnT w="6350" cap="flat" cmpd="sng" algn="ctr">
-                      <a:solidFill>
-                        <a:srgbClr val="343E4C"/>
-                      </a:solidFill>
-                      <a:prstDash val="solid"/>
-                      <a:round/>
-                      <a:headEnd type="none" w="med" len="med"/>
-                      <a:tailEnd type="none" w="med" len="med"/>
-                    </a:lnT>
-                    <a:lnB w="6350" cap="flat" cmpd="sng" algn="ctr">
-                      <a:solidFill>
-                        <a:srgbClr val="343E4C"/>
-                      </a:solidFill>
-                      <a:prstDash val="solid"/>
-                      <a:round/>
-                      <a:headEnd type="none" w="med" len="med"/>
-                      <a:tailEnd type="none" w="med" len="med"/>
-                    </a:lnB>
-                    <a:solidFill>
-                      <a:srgbClr val="1E2530"/>
-                    </a:solidFill>
-                  </a:tcPr>
-                </a:tc>
-                <a:extLst>
-                  <a:ext uri="{0D108BD9-81ED-4DB2-BD59-A6C34878D82A}">
-                    <a16:rowId xmlns:a16="http://schemas.microsoft.com/office/drawing/2014/main" val="10003"/>
-                  </a:ext>
-                </a:extLst>
-              </a:tr>
-              <a:tr h="283464">
-                <a:tc>
-                  <a:txBody>
-                    <a:bodyPr/>
-                    <a:lstStyle/>
-                    <a:p>
-                      <a:pPr marL="0" indent="0">
-                        <a:buNone/>
-                      </a:pPr>
-                      <a:r>
-                        <a:rPr lang="en-US" sz="1100" dirty="0">
-                          <a:solidFill>
-                            <a:srgbClr val="FFFFFF"/>
-                          </a:solidFill>
-                          <a:latin typeface="Calibri" pitchFamily="34" charset="0"/>
-                          <a:ea typeface="Calibri" pitchFamily="34" charset="-122"/>
-                          <a:cs typeface="Calibri" pitchFamily="34" charset="-120"/>
-                        </a:rPr>
-                        <a:t>ShippingCost</a:t>
-                      </a:r>
-                      <a:endParaRPr lang="en-US" sz="1100" dirty="0">
-                        <a:latin typeface="Calibri" charset="0"/>
-                        <a:ea typeface="Calibri" charset="0"/>
-                        <a:cs typeface="Calibri" charset="0"/>
-                      </a:endParaRPr>
-                    </a:p>
-                  </a:txBody>
-                  <a:tcPr>
-                    <a:lnL w="6350" cap="flat" cmpd="sng" algn="ctr">
-                      <a:solidFill>
-                        <a:srgbClr val="343E4C"/>
-                      </a:solidFill>
-                      <a:prstDash val="solid"/>
-                      <a:round/>
-                      <a:headEnd type="none" w="med" len="med"/>
-                      <a:tailEnd type="none" w="med" len="med"/>
-                    </a:lnL>
-                    <a:lnR w="6350" cap="flat" cmpd="sng" algn="ctr">
-                      <a:solidFill>
-                        <a:srgbClr val="343E4C"/>
-                      </a:solidFill>
-                      <a:prstDash val="solid"/>
-                      <a:round/>
-                      <a:headEnd type="none" w="med" len="med"/>
-                      <a:tailEnd type="none" w="med" len="med"/>
-                    </a:lnR>
-                    <a:lnT w="6350" cap="flat" cmpd="sng" algn="ctr">
-                      <a:solidFill>
-                        <a:srgbClr val="343E4C"/>
-                      </a:solidFill>
-                      <a:prstDash val="solid"/>
-                      <a:round/>
-                      <a:headEnd type="none" w="med" len="med"/>
-                      <a:tailEnd type="none" w="med" len="med"/>
-                    </a:lnT>
-                    <a:lnB w="6350" cap="flat" cmpd="sng" algn="ctr">
-                      <a:solidFill>
-                        <a:srgbClr val="343E4C"/>
-                      </a:solidFill>
-                      <a:prstDash val="solid"/>
-                      <a:round/>
-                      <a:headEnd type="none" w="med" len="med"/>
-                      <a:tailEnd type="none" w="med" len="med"/>
-                    </a:lnB>
-                    <a:solidFill>
-                      <a:srgbClr val="1E2530"/>
-                    </a:solidFill>
-                  </a:tcPr>
-                </a:tc>
-                <a:tc>
-                  <a:txBody>
-                    <a:bodyPr/>
-                    <a:lstStyle/>
-                    <a:p>
-                      <a:pPr marL="0" indent="0">
-                        <a:buNone/>
-                      </a:pPr>
-                      <a:r>
-                        <a:rPr lang="en-US" sz="1100" dirty="0">
-                          <a:solidFill>
-                            <a:srgbClr val="FFFFFF"/>
-                          </a:solidFill>
-                          <a:latin typeface="Calibri" pitchFamily="34" charset="0"/>
-                          <a:ea typeface="Calibri" pitchFamily="34" charset="-122"/>
-                          <a:cs typeface="Calibri" pitchFamily="34" charset="-120"/>
-                        </a:rPr>
-                        <a:t>$7.41</a:t>
-                      </a:r>
-                      <a:endParaRPr lang="en-US" sz="1100" dirty="0">
-                        <a:latin typeface="Calibri" charset="0"/>
-                        <a:ea typeface="Calibri" charset="0"/>
-                        <a:cs typeface="Calibri" charset="0"/>
-                      </a:endParaRPr>
-                    </a:p>
-                  </a:txBody>
-                  <a:tcPr>
-                    <a:lnL w="6350" cap="flat" cmpd="sng" algn="ctr">
-                      <a:solidFill>
-                        <a:srgbClr val="343E4C"/>
-                      </a:solidFill>
-                      <a:prstDash val="solid"/>
-                      <a:round/>
-                      <a:headEnd type="none" w="med" len="med"/>
-                      <a:tailEnd type="none" w="med" len="med"/>
-                    </a:lnL>
-                    <a:lnR w="6350" cap="flat" cmpd="sng" algn="ctr">
-                      <a:solidFill>
-                        <a:srgbClr val="343E4C"/>
-                      </a:solidFill>
-                      <a:prstDash val="solid"/>
-                      <a:round/>
-                      <a:headEnd type="none" w="med" len="med"/>
-                      <a:tailEnd type="none" w="med" len="med"/>
-                    </a:lnR>
-                    <a:lnT w="6350" cap="flat" cmpd="sng" algn="ctr">
-                      <a:solidFill>
-                        <a:srgbClr val="343E4C"/>
-                      </a:solidFill>
-                      <a:prstDash val="solid"/>
-                      <a:round/>
-                      <a:headEnd type="none" w="med" len="med"/>
-                      <a:tailEnd type="none" w="med" len="med"/>
-                    </a:lnT>
-                    <a:lnB w="6350" cap="flat" cmpd="sng" algn="ctr">
-                      <a:solidFill>
-                        <a:srgbClr val="343E4C"/>
-                      </a:solidFill>
-                      <a:prstDash val="solid"/>
-                      <a:round/>
-                      <a:headEnd type="none" w="med" len="med"/>
-                      <a:tailEnd type="none" w="med" len="med"/>
-                    </a:lnB>
-                    <a:solidFill>
-                      <a:srgbClr val="1E2530"/>
-                    </a:solidFill>
-                  </a:tcPr>
-                </a:tc>
-                <a:tc>
-                  <a:txBody>
-                    <a:bodyPr/>
-                    <a:lstStyle/>
-                    <a:p>
-                      <a:pPr marL="0" indent="0">
-                        <a:buNone/>
-                      </a:pPr>
-                      <a:r>
-                        <a:rPr lang="en-US" sz="1100" dirty="0">
-                          <a:solidFill>
-                            <a:srgbClr val="FFFFFF"/>
-                          </a:solidFill>
-                          <a:latin typeface="Calibri" pitchFamily="34" charset="0"/>
-                          <a:ea typeface="Calibri" pitchFamily="34" charset="-122"/>
-                          <a:cs typeface="Calibri" pitchFamily="34" charset="-120"/>
-                        </a:rPr>
-                        <a:t>$7.30</a:t>
-                      </a:r>
-                      <a:endParaRPr lang="en-US" sz="1100" dirty="0">
-                        <a:latin typeface="Calibri" charset="0"/>
-                        <a:ea typeface="Calibri" charset="0"/>
-                        <a:cs typeface="Calibri" charset="0"/>
-                      </a:endParaRPr>
-                    </a:p>
-                  </a:txBody>
-                  <a:tcPr>
-                    <a:lnL w="6350" cap="flat" cmpd="sng" algn="ctr">
-                      <a:solidFill>
-                        <a:srgbClr val="343E4C"/>
-                      </a:solidFill>
-                      <a:prstDash val="solid"/>
-                      <a:round/>
-                      <a:headEnd type="none" w="med" len="med"/>
-                      <a:tailEnd type="none" w="med" len="med"/>
-                    </a:lnL>
-                    <a:lnR w="6350" cap="flat" cmpd="sng" algn="ctr">
-                      <a:solidFill>
-                        <a:srgbClr val="343E4C"/>
-                      </a:solidFill>
-                      <a:prstDash val="solid"/>
-                      <a:round/>
-                      <a:headEnd type="none" w="med" len="med"/>
-                      <a:tailEnd type="none" w="med" len="med"/>
-                    </a:lnR>
-                    <a:lnT w="6350" cap="flat" cmpd="sng" algn="ctr">
-                      <a:solidFill>
-                        <a:srgbClr val="343E4C"/>
-                      </a:solidFill>
-                      <a:prstDash val="solid"/>
-                      <a:round/>
-                      <a:headEnd type="none" w="med" len="med"/>
-                      <a:tailEnd type="none" w="med" len="med"/>
-                    </a:lnT>
-                    <a:lnB w="6350" cap="flat" cmpd="sng" algn="ctr">
-                      <a:solidFill>
-                        <a:srgbClr val="343E4C"/>
-                      </a:solidFill>
-                      <a:prstDash val="solid"/>
-                      <a:round/>
-                      <a:headEnd type="none" w="med" len="med"/>
-                      <a:tailEnd type="none" w="med" len="med"/>
-                    </a:lnB>
-                    <a:solidFill>
-                      <a:srgbClr val="1E2530"/>
-                    </a:solidFill>
-                  </a:tcPr>
-                </a:tc>
-                <a:extLst>
-                  <a:ext uri="{0D108BD9-81ED-4DB2-BD59-A6C34878D82A}">
-                    <a16:rowId xmlns:a16="http://schemas.microsoft.com/office/drawing/2014/main" val="10004"/>
-                  </a:ext>
-                </a:extLst>
-              </a:tr>
-            </a:tbl>
-          </a:graphicData>
-        </a:graphic>
-      </p:graphicFrame>
-      <p:sp>
-        <p:nvSpPr>
-          <p:cNvPr id="10" name="Text 6"/>
-          <p:cNvSpPr/>
-          <p:nvPr/>
-        </p:nvSpPr>
-        <p:spPr>
-          <a:xfrm>
-            <a:off x="7178040" y="3520440"/>
-            <a:ext cx="4480560" cy="320040"/>
-          </a:xfrm>
-          <a:prstGeom prst="rect">
-            <a:avLst/>
-          </a:prstGeom>
-          <a:noFill/>
-          <a:ln/>
-        </p:spPr>
-        <p:txBody>
-          <a:bodyPr wrap="square" lIns="0" tIns="0" rIns="0" bIns="0" rtlCol="0" anchor="ctr"/>
-          <a:lstStyle/>
-          <a:p>
-            <a:pPr marL="0" indent="0">
-              <a:buNone/>
-            </a:pPr>
-            <a:r>
-              <a:rPr lang="en-US" sz="1400" b="1" dirty="0">
-                <a:solidFill>
-                  <a:srgbClr val="FF9900"/>
-                </a:solidFill>
-                <a:latin typeface="Calibri" pitchFamily="34" charset="0"/>
-                <a:ea typeface="Calibri" pitchFamily="34" charset="-122"/>
-                <a:cs typeface="Calibri" pitchFamily="34" charset="-120"/>
-              </a:rPr>
-              <a:t>Data Quality Gates</a:t>
-            </a:r>
-            <a:endParaRPr lang="en-US" sz="1400" dirty="0"/>
-          </a:p>
-        </p:txBody>
-      </p:sp>
-      <p:sp>
-        <p:nvSpPr>
-          <p:cNvPr id="11" name="Text 7"/>
-          <p:cNvSpPr/>
-          <p:nvPr/>
-        </p:nvSpPr>
-        <p:spPr>
-          <a:xfrm>
-            <a:off x="7178040" y="3840480"/>
-            <a:ext cx="4480560" cy="1920240"/>
-          </a:xfrm>
-          <a:prstGeom prst="rect">
-            <a:avLst/>
-          </a:prstGeom>
-          <a:noFill/>
-          <a:ln/>
-        </p:spPr>
-        <p:txBody>
-          <a:bodyPr wrap="square" rtlCol="0" anchor="t"/>
-          <a:lstStyle/>
-          <a:p>
-            <a:pPr marL="342900" indent="-342900">
-              <a:spcAft>
-                <a:spcPts val="800"/>
-              </a:spcAft>
-              <a:buSzPct val="100000"/>
-              <a:buChar char="●"/>
-            </a:pPr>
-            <a:r>
-              <a:rPr lang="en-US" sz="1150" dirty="0">
-                <a:solidFill>
-                  <a:srgbClr val="FFFFFF"/>
-                </a:solidFill>
-                <a:latin typeface="Calibri" pitchFamily="34" charset="0"/>
-                <a:ea typeface="Calibri" pitchFamily="34" charset="-122"/>
-                <a:cs typeface="Calibri" pitchFamily="34" charset="-120"/>
-              </a:rPr>
-              <a:t>Missing values across all 22 columns: 0</a:t>
-            </a:r>
-            <a:endParaRPr lang="en-US" sz="1150" dirty="0"/>
-          </a:p>
-          <a:p>
-            <a:pPr marL="342900" indent="-342900">
-              <a:spcAft>
-                <a:spcPts val="800"/>
-              </a:spcAft>
-              <a:buSzPct val="100000"/>
-              <a:buChar char="●"/>
-            </a:pPr>
-            <a:r>
-              <a:rPr lang="en-US" sz="1150" dirty="0">
-                <a:solidFill>
-                  <a:srgbClr val="FFFFFF"/>
-                </a:solidFill>
-                <a:latin typeface="Calibri" pitchFamily="34" charset="0"/>
-                <a:ea typeface="Calibri" pitchFamily="34" charset="-122"/>
-                <a:cs typeface="Calibri" pitchFamily="34" charset="-120"/>
-              </a:rPr>
-              <a:t>Duplicate rows: 0</a:t>
-            </a:r>
-            <a:endParaRPr lang="en-US" sz="1150" dirty="0"/>
-          </a:p>
-          <a:p>
-            <a:pPr marL="342900" indent="-342900">
-              <a:spcAft>
-                <a:spcPts val="800"/>
-              </a:spcAft>
-              <a:buSzPct val="100000"/>
-              <a:buChar char="●"/>
-            </a:pPr>
-            <a:r>
-              <a:rPr lang="en-US" sz="1150" dirty="0">
-                <a:solidFill>
-                  <a:srgbClr val="FFFFFF"/>
-                </a:solidFill>
-                <a:latin typeface="Calibri" pitchFamily="34" charset="0"/>
-                <a:ea typeface="Calibri" pitchFamily="34" charset="-122"/>
-                <a:cs typeface="Calibri" pitchFamily="34" charset="-120"/>
-              </a:rPr>
-              <a:t>Invalid rows (amount, qty, or price ≤ 0): 0</a:t>
-            </a:r>
-            <a:endParaRPr lang="en-US" sz="1150" dirty="0"/>
-          </a:p>
-          <a:p>
-            <a:pPr marL="342900" indent="-342900">
-              <a:spcAft>
-                <a:spcPts val="800"/>
-              </a:spcAft>
-              <a:buSzPct val="100000"/>
-              <a:buChar char="●"/>
-            </a:pPr>
-            <a:r>
-              <a:rPr lang="en-US" sz="1150" dirty="0">
-                <a:solidFill>
-                  <a:srgbClr val="FFFFFF"/>
-                </a:solidFill>
-                <a:latin typeface="Calibri" pitchFamily="34" charset="0"/>
-                <a:ea typeface="Calibri" pitchFamily="34" charset="-122"/>
-                <a:cs typeface="Calibri" pitchFamily="34" charset="-120"/>
-              </a:rPr>
-              <a:t>Boxplots flag high-value orders as expected outliers, not errors</a:t>
-            </a:r>
-            <a:endParaRPr lang="en-US" sz="1150" dirty="0"/>
-          </a:p>
-        </p:txBody>
-      </p:sp>
-      <p:sp>
-        <p:nvSpPr>
-          <p:cNvPr id="13" name="Text 9"/>
-          <p:cNvSpPr/>
-          <p:nvPr/>
-        </p:nvSpPr>
-        <p:spPr>
-          <a:xfrm>
-            <a:off x="11274552" y="6446520"/>
-            <a:ext cx="457200" cy="274320"/>
-          </a:xfrm>
-          <a:prstGeom prst="rect">
-            <a:avLst/>
-          </a:prstGeom>
-          <a:noFill/>
-          <a:ln/>
-        </p:spPr>
-        <p:txBody>
-          <a:bodyPr wrap="square" lIns="0" tIns="0" rIns="0" bIns="0" rtlCol="0" anchor="ctr"/>
-          <a:lstStyle/>
-          <a:p>
-            <a:pPr marL="0" indent="0" algn="r">
-              <a:buNone/>
-            </a:pPr>
-            <a:r>
-              <a:rPr lang="en-US" sz="900" dirty="0">
-                <a:solidFill>
-                  <a:srgbClr val="6B7480"/>
-                </a:solidFill>
-                <a:latin typeface="Calibri" pitchFamily="34" charset="0"/>
-                <a:ea typeface="Calibri" pitchFamily="34" charset="-122"/>
-                <a:cs typeface="Calibri" pitchFamily="34" charset="-120"/>
-              </a:rPr>
-              <a:t>3</a:t>
-            </a:r>
-            <a:endParaRPr lang="en-US" sz="900" dirty="0"/>
+          <p:cNvPr id="17" name="TextBox 16">
+            <a:extLst>
+              <a:ext uri="{FF2B5EF4-FFF2-40B4-BE49-F238E27FC236}">
+                <a16:creationId xmlns:a16="http://schemas.microsoft.com/office/drawing/2014/main" id="{460874EA-6634-EBBF-41A2-1AC8C5E987E9}"/>
+              </a:ext>
+            </a:extLst>
+          </p:cNvPr>
+          <p:cNvSpPr txBox="1"/>
+          <p:nvPr/>
+        </p:nvSpPr>
+        <p:spPr>
+          <a:xfrm>
+            <a:off x="7040907" y="1573961"/>
+            <a:ext cx="4895989" cy="4213076"/>
+          </a:xfrm>
+          <a:prstGeom prst="rect">
+            <a:avLst/>
+          </a:prstGeom>
+          <a:noFill/>
+        </p:spPr>
+        <p:txBody>
+          <a:bodyPr wrap="square">
+            <a:spAutoFit/>
+          </a:bodyPr>
+          <a:lstStyle/>
+          <a:p>
+            <a:pPr>
+              <a:lnSpc>
+                <a:spcPts val="1425"/>
+              </a:lnSpc>
+              <a:buNone/>
+            </a:pPr>
+            <a:r>
+              <a:rPr lang="en-US" sz="1100" b="0" dirty="0">
+                <a:solidFill>
+                  <a:schemeClr val="accent2">
+                    <a:lumMod val="75000"/>
+                  </a:schemeClr>
+                </a:solidFill>
+                <a:effectLst/>
+                <a:latin typeface="Consolas" panose="020B0609020204030204" pitchFamily="49" charset="0"/>
+              </a:rPr>
+              <a:t>1. Distribution of Total Sales Amount</a:t>
+            </a:r>
+          </a:p>
+          <a:p>
+            <a:pPr>
+              <a:lnSpc>
+                <a:spcPts val="1425"/>
+              </a:lnSpc>
+              <a:buNone/>
+            </a:pPr>
+            <a:endParaRPr lang="en-US" sz="1100" b="0" dirty="0">
+              <a:effectLst/>
+              <a:latin typeface="Consolas" panose="020B0609020204030204" pitchFamily="49" charset="0"/>
+            </a:endParaRPr>
+          </a:p>
+          <a:p>
+            <a:pPr>
+              <a:lnSpc>
+                <a:spcPts val="1425"/>
+              </a:lnSpc>
+              <a:buNone/>
+            </a:pPr>
+            <a:r>
+              <a:rPr lang="en-US" sz="1100" b="0" dirty="0">
+                <a:effectLst/>
+                <a:latin typeface="Consolas" panose="020B0609020204030204" pitchFamily="49" charset="0"/>
+              </a:rPr>
+              <a:t>Most orders have a low to medium total amount, while only a few orders have very high values. This indicates a right-skewed distribution.</a:t>
+            </a:r>
+          </a:p>
+          <a:p>
+            <a:pPr>
+              <a:lnSpc>
+                <a:spcPts val="1425"/>
+              </a:lnSpc>
+              <a:buNone/>
+            </a:pPr>
+            <a:endParaRPr lang="en-US" sz="1100" b="0" dirty="0">
+              <a:effectLst/>
+              <a:latin typeface="Consolas" panose="020B0609020204030204" pitchFamily="49" charset="0"/>
+            </a:endParaRPr>
+          </a:p>
+          <a:p>
+            <a:pPr>
+              <a:lnSpc>
+                <a:spcPts val="1425"/>
+              </a:lnSpc>
+              <a:buNone/>
+            </a:pPr>
+            <a:r>
+              <a:rPr lang="en-US" sz="1100" b="0" dirty="0">
+                <a:solidFill>
+                  <a:schemeClr val="accent2">
+                    <a:lumMod val="75000"/>
+                  </a:schemeClr>
+                </a:solidFill>
+                <a:effectLst/>
+                <a:latin typeface="Consolas" panose="020B0609020204030204" pitchFamily="49" charset="0"/>
+              </a:rPr>
+              <a:t>2. Distribution of Unit Prices</a:t>
+            </a:r>
+          </a:p>
+          <a:p>
+            <a:pPr>
+              <a:lnSpc>
+                <a:spcPts val="1425"/>
+              </a:lnSpc>
+              <a:buNone/>
+            </a:pPr>
+            <a:endParaRPr lang="en-US" sz="1100" b="0" dirty="0">
+              <a:effectLst/>
+              <a:latin typeface="Consolas" panose="020B0609020204030204" pitchFamily="49" charset="0"/>
+            </a:endParaRPr>
+          </a:p>
+          <a:p>
+            <a:pPr>
+              <a:lnSpc>
+                <a:spcPts val="1425"/>
+              </a:lnSpc>
+              <a:buNone/>
+            </a:pPr>
+            <a:r>
+              <a:rPr lang="en-US" sz="1100" b="0" dirty="0">
+                <a:effectLst/>
+                <a:latin typeface="Consolas" panose="020B0609020204030204" pitchFamily="49" charset="0"/>
+              </a:rPr>
+              <a:t>Unit prices are evenly distributed across the dataset, showing that products are available in different price ranges.</a:t>
+            </a:r>
+          </a:p>
+          <a:p>
+            <a:pPr>
+              <a:lnSpc>
+                <a:spcPts val="1425"/>
+              </a:lnSpc>
+              <a:buNone/>
+            </a:pPr>
+            <a:endParaRPr lang="en-US" sz="1100" b="1" dirty="0">
+              <a:latin typeface="Consolas" panose="020B0609020204030204" pitchFamily="49" charset="0"/>
+            </a:endParaRPr>
+          </a:p>
+          <a:p>
+            <a:pPr>
+              <a:lnSpc>
+                <a:spcPts val="1425"/>
+              </a:lnSpc>
+              <a:buNone/>
+            </a:pPr>
+            <a:r>
+              <a:rPr lang="en-US" sz="1100" b="0" dirty="0">
+                <a:solidFill>
+                  <a:schemeClr val="accent2">
+                    <a:lumMod val="75000"/>
+                  </a:schemeClr>
+                </a:solidFill>
+                <a:effectLst/>
+                <a:latin typeface="Consolas" panose="020B0609020204030204" pitchFamily="49" charset="0"/>
+              </a:rPr>
+              <a:t>3. Distribution of Order Quantities</a:t>
+            </a:r>
+            <a:endParaRPr lang="en-US" sz="1100" dirty="0">
+              <a:solidFill>
+                <a:schemeClr val="accent2">
+                  <a:lumMod val="75000"/>
+                </a:schemeClr>
+              </a:solidFill>
+              <a:latin typeface="Consolas" panose="020B0609020204030204" pitchFamily="49" charset="0"/>
+            </a:endParaRPr>
+          </a:p>
+          <a:p>
+            <a:pPr>
+              <a:lnSpc>
+                <a:spcPts val="1425"/>
+              </a:lnSpc>
+              <a:buNone/>
+            </a:pPr>
+            <a:endParaRPr lang="en-US" sz="1100" b="0" dirty="0">
+              <a:effectLst/>
+              <a:latin typeface="Consolas" panose="020B0609020204030204" pitchFamily="49" charset="0"/>
+            </a:endParaRPr>
+          </a:p>
+          <a:p>
+            <a:pPr>
+              <a:lnSpc>
+                <a:spcPts val="1425"/>
+              </a:lnSpc>
+              <a:buNone/>
+            </a:pPr>
+            <a:r>
+              <a:rPr lang="en-US" sz="1100" b="0" dirty="0">
+                <a:effectLst/>
+                <a:latin typeface="Consolas" panose="020B0609020204030204" pitchFamily="49" charset="0"/>
+              </a:rPr>
+              <a:t>Order quantities are evenly distributed between 1 and 5 items, indicating that customers purchase different quantities with no dominant value.</a:t>
+            </a:r>
+          </a:p>
+          <a:p>
+            <a:pPr>
+              <a:lnSpc>
+                <a:spcPts val="1425"/>
+              </a:lnSpc>
+              <a:buNone/>
+            </a:pPr>
+            <a:endParaRPr lang="en-US" sz="1100" b="0" dirty="0">
+              <a:effectLst/>
+              <a:latin typeface="Consolas" panose="020B0609020204030204" pitchFamily="49" charset="0"/>
+            </a:endParaRPr>
+          </a:p>
+          <a:p>
+            <a:pPr>
+              <a:lnSpc>
+                <a:spcPts val="1425"/>
+              </a:lnSpc>
+              <a:buNone/>
+            </a:pPr>
+            <a:r>
+              <a:rPr lang="en-US" sz="1100" b="0" dirty="0">
+                <a:solidFill>
+                  <a:schemeClr val="accent2">
+                    <a:lumMod val="75000"/>
+                  </a:schemeClr>
+                </a:solidFill>
+                <a:effectLst/>
+                <a:latin typeface="Consolas" panose="020B0609020204030204" pitchFamily="49" charset="0"/>
+              </a:rPr>
+              <a:t>4. Total Sales Amount by Category</a:t>
+            </a:r>
+            <a:br>
+              <a:rPr lang="en-US" sz="1100" b="0" dirty="0">
+                <a:solidFill>
+                  <a:schemeClr val="accent2">
+                    <a:lumMod val="75000"/>
+                  </a:schemeClr>
+                </a:solidFill>
+                <a:effectLst/>
+                <a:latin typeface="Consolas" panose="020B0609020204030204" pitchFamily="49" charset="0"/>
+              </a:rPr>
+            </a:br>
+            <a:endParaRPr lang="en-US" sz="1100" b="0" dirty="0">
+              <a:solidFill>
+                <a:schemeClr val="accent2">
+                  <a:lumMod val="75000"/>
+                </a:schemeClr>
+              </a:solidFill>
+              <a:effectLst/>
+              <a:latin typeface="Consolas" panose="020B0609020204030204" pitchFamily="49" charset="0"/>
+            </a:endParaRPr>
+          </a:p>
+          <a:p>
+            <a:pPr>
+              <a:lnSpc>
+                <a:spcPts val="1425"/>
+              </a:lnSpc>
+              <a:buNone/>
+            </a:pPr>
+            <a:r>
+              <a:rPr lang="en-US" sz="1100" b="0" dirty="0">
+                <a:effectLst/>
+                <a:latin typeface="Consolas" panose="020B0609020204030204" pitchFamily="49" charset="0"/>
+              </a:rPr>
+              <a:t>All categories have a similar distribution of sales amounts. Several outliers are present, indicating that a few orders have exceptionally high sales values.</a:t>
+            </a:r>
           </a:p>
         </p:txBody>
       </p:sp>
@@ -13526,45 +12483,6 @@
       </p:sp>
       <p:sp>
         <p:nvSpPr>
-          <p:cNvPr id="27" name="Text 24"/>
-          <p:cNvSpPr/>
-          <p:nvPr/>
-        </p:nvSpPr>
-        <p:spPr>
-          <a:xfrm>
-            <a:off x="548640" y="6446520"/>
-            <a:ext cx="7315200" cy="274320"/>
-          </a:xfrm>
-          <a:prstGeom prst="rect">
-            <a:avLst/>
-          </a:prstGeom>
-          <a:noFill/>
-          <a:ln/>
-        </p:spPr>
-        <p:txBody>
-          <a:bodyPr wrap="square" lIns="0" tIns="0" rIns="0" bIns="0" rtlCol="0" anchor="ctr"/>
-          <a:lstStyle/>
-          <a:p>
-            <a:pPr marL="0" indent="0">
-              <a:buNone/>
-            </a:pPr>
-            <a:r>
-              <a:rPr lang="en-US" sz="900" dirty="0">
-                <a:solidFill>
-                  <a:srgbClr val="6B7480"/>
-                </a:solidFill>
-                <a:latin typeface="Calibri" pitchFamily="34" charset="0"/>
-                <a:ea typeface="Calibri" pitchFamily="34" charset="-122"/>
-                <a:cs typeface="Calibri" pitchFamily="34" charset="-120"/>
-              </a:rPr>
-              <a:t>Amazon Sales Performance Analysis  •  Amazon x Simplon Maghreb</a:t>
-            </a:r>
-            <a:endParaRPr lang="en-US" sz="900" dirty="0"/>
-          </a:p>
-        </p:txBody>
-      </p:sp>
-      <p:sp>
-        <p:nvSpPr>
           <p:cNvPr id="28" name="Text 25"/>
           <p:cNvSpPr/>
           <p:nvPr/>
@@ -14029,45 +12947,6 @@
               <a:t>Revenue by city &amp; customer, order share by category, geographic revenue heatmap.</a:t>
             </a:r>
             <a:endParaRPr lang="en-US" sz="1050" dirty="0"/>
-          </a:p>
-        </p:txBody>
-      </p:sp>
-      <p:sp>
-        <p:nvSpPr>
-          <p:cNvPr id="14" name="Text 10"/>
-          <p:cNvSpPr/>
-          <p:nvPr/>
-        </p:nvSpPr>
-        <p:spPr>
-          <a:xfrm>
-            <a:off x="548640" y="6446520"/>
-            <a:ext cx="7315200" cy="274320"/>
-          </a:xfrm>
-          <a:prstGeom prst="rect">
-            <a:avLst/>
-          </a:prstGeom>
-          <a:noFill/>
-          <a:ln/>
-        </p:spPr>
-        <p:txBody>
-          <a:bodyPr wrap="square" lIns="0" tIns="0" rIns="0" bIns="0" rtlCol="0" anchor="ctr"/>
-          <a:lstStyle/>
-          <a:p>
-            <a:pPr marL="0" indent="0">
-              <a:buNone/>
-            </a:pPr>
-            <a:r>
-              <a:rPr lang="en-US" sz="900" dirty="0">
-                <a:solidFill>
-                  <a:srgbClr val="6B7480"/>
-                </a:solidFill>
-                <a:latin typeface="Calibri" pitchFamily="34" charset="0"/>
-                <a:ea typeface="Calibri" pitchFamily="34" charset="-122"/>
-                <a:cs typeface="Calibri" pitchFamily="34" charset="-120"/>
-              </a:rPr>
-              <a:t>Amazon Sales Performance Analysis  •  Amazon x Simplon Maghreb</a:t>
-            </a:r>
-            <a:endParaRPr lang="en-US" sz="900" dirty="0"/>
           </a:p>
         </p:txBody>
       </p:sp>
